--- a/ゲーム科2年/00_前期/ゲーム開発Ⅰ/ゲーム数学Ⅱ/座学/08_平行移動行列.pptx
+++ b/ゲーム科2年/00_前期/ゲーム開発Ⅰ/ゲーム数学Ⅱ/座学/08_平行移動行列.pptx
@@ -265,7 +265,7 @@
           <a:p>
             <a:fld id="{E9CC885B-4903-4D54-9A93-00025F12DED9}" type="datetimeFigureOut">
               <a:rPr kumimoji="1" lang="ja-JP" altLang="en-US" smtClean="0"/>
-              <a:t>2024/11/19</a:t>
+              <a:t>2025/4/15</a:t>
             </a:fld>
             <a:endParaRPr kumimoji="1" lang="ja-JP" altLang="en-US"/>
           </a:p>
@@ -495,7 +495,7 @@
           <a:p>
             <a:fld id="{E9CC885B-4903-4D54-9A93-00025F12DED9}" type="datetimeFigureOut">
               <a:rPr kumimoji="1" lang="ja-JP" altLang="en-US" smtClean="0"/>
-              <a:t>2024/11/19</a:t>
+              <a:t>2025/4/15</a:t>
             </a:fld>
             <a:endParaRPr kumimoji="1" lang="ja-JP" altLang="en-US"/>
           </a:p>
@@ -735,7 +735,7 @@
           <a:p>
             <a:fld id="{E9CC885B-4903-4D54-9A93-00025F12DED9}" type="datetimeFigureOut">
               <a:rPr kumimoji="1" lang="ja-JP" altLang="en-US" smtClean="0"/>
-              <a:t>2024/11/19</a:t>
+              <a:t>2025/4/15</a:t>
             </a:fld>
             <a:endParaRPr kumimoji="1" lang="ja-JP" altLang="en-US"/>
           </a:p>
@@ -965,7 +965,7 @@
           <a:p>
             <a:fld id="{E9CC885B-4903-4D54-9A93-00025F12DED9}" type="datetimeFigureOut">
               <a:rPr kumimoji="1" lang="ja-JP" altLang="en-US" smtClean="0"/>
-              <a:t>2024/11/19</a:t>
+              <a:t>2025/4/15</a:t>
             </a:fld>
             <a:endParaRPr kumimoji="1" lang="ja-JP" altLang="en-US"/>
           </a:p>
@@ -1240,7 +1240,7 @@
           <a:p>
             <a:fld id="{E9CC885B-4903-4D54-9A93-00025F12DED9}" type="datetimeFigureOut">
               <a:rPr kumimoji="1" lang="ja-JP" altLang="en-US" smtClean="0"/>
-              <a:t>2024/11/19</a:t>
+              <a:t>2025/4/15</a:t>
             </a:fld>
             <a:endParaRPr kumimoji="1" lang="ja-JP" altLang="en-US"/>
           </a:p>
@@ -1569,7 +1569,7 @@
           <a:p>
             <a:fld id="{E9CC885B-4903-4D54-9A93-00025F12DED9}" type="datetimeFigureOut">
               <a:rPr kumimoji="1" lang="ja-JP" altLang="en-US" smtClean="0"/>
-              <a:t>2024/11/19</a:t>
+              <a:t>2025/4/15</a:t>
             </a:fld>
             <a:endParaRPr kumimoji="1" lang="ja-JP" altLang="en-US"/>
           </a:p>
@@ -2045,7 +2045,7 @@
           <a:p>
             <a:fld id="{E9CC885B-4903-4D54-9A93-00025F12DED9}" type="datetimeFigureOut">
               <a:rPr kumimoji="1" lang="ja-JP" altLang="en-US" smtClean="0"/>
-              <a:t>2024/11/19</a:t>
+              <a:t>2025/4/15</a:t>
             </a:fld>
             <a:endParaRPr kumimoji="1" lang="ja-JP" altLang="en-US"/>
           </a:p>
@@ -2186,7 +2186,7 @@
           <a:p>
             <a:fld id="{E9CC885B-4903-4D54-9A93-00025F12DED9}" type="datetimeFigureOut">
               <a:rPr kumimoji="1" lang="ja-JP" altLang="en-US" smtClean="0"/>
-              <a:t>2024/11/19</a:t>
+              <a:t>2025/4/15</a:t>
             </a:fld>
             <a:endParaRPr kumimoji="1" lang="ja-JP" altLang="en-US"/>
           </a:p>
@@ -2299,7 +2299,7 @@
           <a:p>
             <a:fld id="{E9CC885B-4903-4D54-9A93-00025F12DED9}" type="datetimeFigureOut">
               <a:rPr kumimoji="1" lang="ja-JP" altLang="en-US" smtClean="0"/>
-              <a:t>2024/11/19</a:t>
+              <a:t>2025/4/15</a:t>
             </a:fld>
             <a:endParaRPr kumimoji="1" lang="ja-JP" altLang="en-US"/>
           </a:p>
@@ -2642,7 +2642,7 @@
           <a:p>
             <a:fld id="{E9CC885B-4903-4D54-9A93-00025F12DED9}" type="datetimeFigureOut">
               <a:rPr kumimoji="1" lang="ja-JP" altLang="en-US" smtClean="0"/>
-              <a:t>2024/11/19</a:t>
+              <a:t>2025/4/15</a:t>
             </a:fld>
             <a:endParaRPr kumimoji="1" lang="ja-JP" altLang="en-US"/>
           </a:p>
@@ -2930,7 +2930,7 @@
           <a:p>
             <a:fld id="{E9CC885B-4903-4D54-9A93-00025F12DED9}" type="datetimeFigureOut">
               <a:rPr kumimoji="1" lang="ja-JP" altLang="en-US" smtClean="0"/>
-              <a:t>2024/11/19</a:t>
+              <a:t>2025/4/15</a:t>
             </a:fld>
             <a:endParaRPr kumimoji="1" lang="ja-JP" altLang="en-US"/>
           </a:p>
@@ -3203,7 +3203,7 @@
           <a:p>
             <a:fld id="{E9CC885B-4903-4D54-9A93-00025F12DED9}" type="datetimeFigureOut">
               <a:rPr kumimoji="1" lang="ja-JP" altLang="en-US" smtClean="0"/>
-              <a:t>2024/11/19</a:t>
+              <a:t>2025/4/15</a:t>
             </a:fld>
             <a:endParaRPr kumimoji="1" lang="ja-JP" altLang="en-US"/>
           </a:p>
@@ -3708,8 +3708,8 @@
           </a:p>
         </p:txBody>
       </p:sp>
-      <mc:AlternateContent xmlns:mc="http://schemas.openxmlformats.org/markup-compatibility/2006">
-        <mc:Choice xmlns:a14="http://schemas.microsoft.com/office/drawing/2010/main" Requires="a14">
+      <mc:AlternateContent xmlns:mc="http://schemas.openxmlformats.org/markup-compatibility/2006" xmlns:a14="http://schemas.microsoft.com/office/drawing/2010/main">
+        <mc:Choice Requires="a14">
           <p:sp>
             <p:nvSpPr>
               <p:cNvPr id="6" name="テキスト ボックス 5">
@@ -4146,7 +4146,7 @@
             </p:txBody>
           </p:sp>
         </mc:Choice>
-        <mc:Fallback>
+        <mc:Fallback xmlns="">
           <p:sp>
             <p:nvSpPr>
               <p:cNvPr id="6" name="テキスト ボックス 5">
@@ -4191,8 +4191,8 @@
           </p:sp>
         </mc:Fallback>
       </mc:AlternateContent>
-      <mc:AlternateContent xmlns:mc="http://schemas.openxmlformats.org/markup-compatibility/2006">
-        <mc:Choice xmlns:a14="http://schemas.microsoft.com/office/drawing/2010/main" Requires="a14">
+      <mc:AlternateContent xmlns:mc="http://schemas.openxmlformats.org/markup-compatibility/2006" xmlns:a14="http://schemas.microsoft.com/office/drawing/2010/main">
+        <mc:Choice Requires="a14">
           <p:sp>
             <p:nvSpPr>
               <p:cNvPr id="5" name="テキスト ボックス 4">
@@ -4316,7 +4316,7 @@
             </p:txBody>
           </p:sp>
         </mc:Choice>
-        <mc:Fallback>
+        <mc:Fallback xmlns="">
           <p:sp>
             <p:nvSpPr>
               <p:cNvPr id="5" name="テキスト ボックス 4">
@@ -4361,8 +4361,8 @@
           </p:sp>
         </mc:Fallback>
       </mc:AlternateContent>
-      <mc:AlternateContent xmlns:mc="http://schemas.openxmlformats.org/markup-compatibility/2006">
-        <mc:Choice xmlns:a14="http://schemas.microsoft.com/office/drawing/2010/main" Requires="a14">
+      <mc:AlternateContent xmlns:mc="http://schemas.openxmlformats.org/markup-compatibility/2006" xmlns:a14="http://schemas.microsoft.com/office/drawing/2010/main">
+        <mc:Choice Requires="a14">
           <p:sp>
             <p:nvSpPr>
               <p:cNvPr id="7" name="テキスト ボックス 6">
@@ -4455,7 +4455,7 @@
             </p:txBody>
           </p:sp>
         </mc:Choice>
-        <mc:Fallback>
+        <mc:Fallback xmlns="">
           <p:sp>
             <p:nvSpPr>
               <p:cNvPr id="7" name="テキスト ボックス 6">
@@ -4887,22 +4887,13 @@
                             </m:e>
                             <m:e>
                               <m:r>
-                                <a:rPr lang="en-US" altLang="ja-JP" sz="2400" i="1" smtClean="0">
+                                <a:rPr lang="en-US" altLang="ja-JP" sz="2400" i="1">
                                   <a:solidFill>
                                     <a:srgbClr val="FF0000"/>
                                   </a:solidFill>
                                   <a:latin typeface="Cambria Math" panose="02040503050406030204" pitchFamily="18" charset="0"/>
                                 </a:rPr>
-                                <m:t>4</m:t>
-                              </m:r>
-                              <m:r>
-                                <a:rPr lang="en-US" altLang="ja-JP" sz="2400" b="0" i="1" smtClean="0">
-                                  <a:solidFill>
-                                    <a:srgbClr val="FF0000"/>
-                                  </a:solidFill>
-                                  <a:latin typeface="Cambria Math" panose="02040503050406030204" pitchFamily="18" charset="0"/>
-                                </a:rPr>
-                                <m:t>0</m:t>
+                                <m:t>50</m:t>
                               </m:r>
                             </m:e>
                           </m:mr>
@@ -5139,8 +5130,8 @@
           </a:p>
         </p:txBody>
       </p:sp>
-      <mc:AlternateContent xmlns:mc="http://schemas.openxmlformats.org/markup-compatibility/2006">
-        <mc:Choice xmlns:a14="http://schemas.microsoft.com/office/drawing/2010/main" Requires="a14">
+      <mc:AlternateContent xmlns:mc="http://schemas.openxmlformats.org/markup-compatibility/2006" xmlns:a14="http://schemas.microsoft.com/office/drawing/2010/main">
+        <mc:Choice Requires="a14">
           <p:sp>
             <p:nvSpPr>
               <p:cNvPr id="6" name="テキスト ボックス 5">
@@ -5646,7 +5637,7 @@
             </p:txBody>
           </p:sp>
         </mc:Choice>
-        <mc:Fallback>
+        <mc:Fallback xmlns="">
           <p:sp>
             <p:nvSpPr>
               <p:cNvPr id="6" name="テキスト ボックス 5">
@@ -5809,8 +5800,8 @@
           </a:p>
         </p:txBody>
       </p:sp>
-      <mc:AlternateContent xmlns:mc="http://schemas.openxmlformats.org/markup-compatibility/2006">
-        <mc:Choice xmlns:a14="http://schemas.microsoft.com/office/drawing/2010/main" Requires="a14">
+      <mc:AlternateContent xmlns:mc="http://schemas.openxmlformats.org/markup-compatibility/2006" xmlns:a14="http://schemas.microsoft.com/office/drawing/2010/main">
+        <mc:Choice Requires="a14">
           <p:sp>
             <p:nvSpPr>
               <p:cNvPr id="6" name="テキスト ボックス 5">
@@ -6401,7 +6392,7 @@
             </p:txBody>
           </p:sp>
         </mc:Choice>
-        <mc:Fallback>
+        <mc:Fallback xmlns="">
           <p:sp>
             <p:nvSpPr>
               <p:cNvPr id="6" name="テキスト ボックス 5">
@@ -6512,8 +6503,8 @@
           </a:p>
         </p:txBody>
       </p:sp>
-      <mc:AlternateContent xmlns:mc="http://schemas.openxmlformats.org/markup-compatibility/2006">
-        <mc:Choice xmlns:a14="http://schemas.microsoft.com/office/drawing/2010/main" Requires="a14">
+      <mc:AlternateContent xmlns:mc="http://schemas.openxmlformats.org/markup-compatibility/2006" xmlns:a14="http://schemas.microsoft.com/office/drawing/2010/main">
+        <mc:Choice Requires="a14">
           <p:sp>
             <p:nvSpPr>
               <p:cNvPr id="6" name="テキスト ボックス 5">
@@ -7301,7 +7292,7 @@
             </p:txBody>
           </p:sp>
         </mc:Choice>
-        <mc:Fallback>
+        <mc:Fallback xmlns="">
           <p:sp>
             <p:nvSpPr>
               <p:cNvPr id="6" name="テキスト ボックス 5">
@@ -7412,8 +7403,8 @@
           </a:p>
         </p:txBody>
       </p:sp>
-      <mc:AlternateContent xmlns:mc="http://schemas.openxmlformats.org/markup-compatibility/2006">
-        <mc:Choice xmlns:a14="http://schemas.microsoft.com/office/drawing/2010/main" Requires="a14">
+      <mc:AlternateContent xmlns:mc="http://schemas.openxmlformats.org/markup-compatibility/2006" xmlns:a14="http://schemas.microsoft.com/office/drawing/2010/main">
+        <mc:Choice Requires="a14">
           <p:sp>
             <p:nvSpPr>
               <p:cNvPr id="6" name="テキスト ボックス 5">
@@ -8073,7 +8064,7 @@
             </p:txBody>
           </p:sp>
         </mc:Choice>
-        <mc:Fallback>
+        <mc:Fallback xmlns="">
           <p:sp>
             <p:nvSpPr>
               <p:cNvPr id="6" name="テキスト ボックス 5">
